--- a/presentations/PR_L06_LetterPress_Lesson.pptx
+++ b/presentations/PR_L06_LetterPress_Lesson.pptx
@@ -2617,7 +2617,7 @@
                 <a:ea typeface="IBM Plex Sans" pitchFamily="34" charset="-122"/>
                 <a:cs typeface="IBM Plex Sans" pitchFamily="34" charset="-120"/>
               </a:rPr>
-              <a:t>Mistake: trying to change one character in place, when a string cannot be edited.</a:t>
+              <a:t>Common mistake: trying to change one character in place, when a string cannot be edited.</a:t>
             </a:r>
             <a:endParaRPr lang="en-US" sz="1700" dirty="0"/>
           </a:p>
@@ -7905,7 +7905,7 @@
                 <a:ea typeface="IBM Plex Sans" pitchFamily="34" charset="-122"/>
                 <a:cs typeface="IBM Plex Sans" pitchFamily="34" charset="-120"/>
               </a:rPr>
-              <a:t>Mistake: asking for position len(), which is one past the end and stops the program.</a:t>
+              <a:t>Common mistake: asking for position len(), which is one past the end and stops the program.</a:t>
             </a:r>
             <a:endParaRPr lang="en-US" sz="1700" dirty="0"/>
           </a:p>
@@ -8481,7 +8481,7 @@
                 <a:ea typeface="IBM Plex Sans" pitchFamily="34" charset="-122"/>
                 <a:cs typeface="IBM Plex Sans" pitchFamily="34" charset="-120"/>
               </a:rPr>
-              <a:t>Mistake: expecting word[0:3] to give four characters rather than three.</a:t>
+              <a:t>Common mistake: expecting word[0:3] to give four characters rather than three.</a:t>
             </a:r>
             <a:endParaRPr lang="en-US" sz="1700" dirty="0"/>
           </a:p>
@@ -9057,7 +9057,7 @@
                 <a:ea typeface="IBM Plex Sans" pitchFamily="34" charset="-122"/>
                 <a:cs typeface="IBM Plex Sans" pitchFamily="34" charset="-120"/>
               </a:rPr>
-              <a:t>Mistake: calling lower() but never storing or using what it gives back.</a:t>
+              <a:t>Common mistake: calling lower() but never storing or using what it gives back.</a:t>
             </a:r>
             <a:endParaRPr lang="en-US" sz="1700" dirty="0"/>
           </a:p>
@@ -9633,7 +9633,7 @@
                 <a:ea typeface="IBM Plex Sans" pitchFamily="34" charset="-122"/>
                 <a:cs typeface="IBM Plex Sans" pitchFamily="34" charset="-120"/>
               </a:rPr>
-              <a:t>Mistake: treating find()'s 0 as 'not found', when 0 means the very start.</a:t>
+              <a:t>Common mistake: treating find()'s 0 as 'not found', when 0 means the very start.</a:t>
             </a:r>
             <a:endParaRPr lang="en-US" sz="1700" dirty="0"/>
           </a:p>
@@ -10209,7 +10209,7 @@
                 <a:ea typeface="IBM Plex Sans" pitchFamily="34" charset="-122"/>
                 <a:cs typeface="IBM Plex Sans" pitchFamily="34" charset="-120"/>
               </a:rPr>
-              <a:t>Mistake: forgetting to wrap round after z, which gives a punctuation mark instead.</a:t>
+              <a:t>Common mistake: forgetting to wrap round after z, which gives a punctuation mark instead.</a:t>
             </a:r>
             <a:endParaRPr lang="en-US" sz="1700" dirty="0"/>
           </a:p>
